--- a/tasks/finalpool/terminal-canvas-wc-excel-ppt-email/groundtruth_workspace/Purchase_Behavior_Presentation.pptx
+++ b/tasks/finalpool/terminal-canvas-wc-excel-ppt-email/groundtruth_workspace/Purchase_Behavior_Presentation.pptx
@@ -3094,19 +3094,29 @@
       <p:grpSpPr/>
       <p:sp>
         <p:nvSpPr>
-          <p:cNvPr id="2" name="Title 1"/>
-          <p:cNvSpPr>
-            <a:spLocks noGrp="1"/>
-          </p:cNvSpPr>
-          <p:nvPr>
-            <p:ph type="ctrTitle"/>
-          </p:nvPr>
-        </p:nvSpPr>
-        <p:spPr/>
-        <p:txBody>
-          <a:bodyPr/>
-          <a:lstStyle/>
-          <a:p>
+          <p:cNvPr id="2" name="TextBox 1"/>
+          <p:cNvSpPr txBox="1"/>
+          <p:nvPr/>
+        </p:nvSpPr>
+        <p:spPr>
+          <a:xfrm>
+            <a:off x="914400" y="2286000"/>
+            <a:ext cx="10332720" cy="1371600"/>
+          </a:xfrm>
+          <a:prstGeom prst="rect">
+            <a:avLst/>
+          </a:prstGeom>
+          <a:noFill/>
+        </p:spPr>
+        <p:txBody>
+          <a:bodyPr wrap="none">
+            <a:spAutoFit/>
+          </a:bodyPr>
+          <a:lstStyle/>
+          <a:p>
+            <a:pPr>
+              <a:defRPr sz="4400" b="1"/>
+            </a:pPr>
             <a:r>
               <a:t>Student Electronics Purchase Behavior Analysis</a:t>
             </a:r>
@@ -3115,19 +3125,29 @@
       </p:sp>
       <p:sp>
         <p:nvSpPr>
-          <p:cNvPr id="3" name="Subtitle 2"/>
-          <p:cNvSpPr>
-            <a:spLocks noGrp="1"/>
-          </p:cNvSpPr>
-          <p:nvPr>
-            <p:ph type="subTitle" idx="1"/>
-          </p:nvPr>
-        </p:nvSpPr>
-        <p:spPr/>
-        <p:txBody>
-          <a:bodyPr/>
-          <a:lstStyle/>
-          <a:p>
+          <p:cNvPr id="3" name="TextBox 2"/>
+          <p:cNvSpPr txBox="1"/>
+          <p:nvPr/>
+        </p:nvSpPr>
+        <p:spPr>
+          <a:xfrm>
+            <a:off x="914400" y="3840480"/>
+            <a:ext cx="10332720" cy="914400"/>
+          </a:xfrm>
+          <a:prstGeom prst="rect">
+            <a:avLst/>
+          </a:prstGeom>
+          <a:noFill/>
+        </p:spPr>
+        <p:txBody>
+          <a:bodyPr wrap="none">
+            <a:spAutoFit/>
+          </a:bodyPr>
+          <a:lstStyle/>
+          <a:p>
+            <a:pPr>
+              <a:defRPr sz="2200"/>
+            </a:pPr>
             <a:r>
               <a:t>Applied Analytics Course Performance vs. Bookstore Electronics Purchases</a:t>
             </a:r>
@@ -3154,19 +3174,29 @@
       <p:grpSpPr/>
       <p:sp>
         <p:nvSpPr>
-          <p:cNvPr id="2" name="Title 1"/>
-          <p:cNvSpPr>
-            <a:spLocks noGrp="1"/>
-          </p:cNvSpPr>
-          <p:nvPr>
-            <p:ph type="title"/>
-          </p:nvPr>
-        </p:nvSpPr>
-        <p:spPr/>
-        <p:txBody>
-          <a:bodyPr/>
-          <a:lstStyle/>
-          <a:p>
+          <p:cNvPr id="2" name="TextBox 1"/>
+          <p:cNvSpPr txBox="1"/>
+          <p:nvPr/>
+        </p:nvSpPr>
+        <p:spPr>
+          <a:xfrm>
+            <a:off x="457200" y="274320"/>
+            <a:ext cx="11247120" cy="1097280"/>
+          </a:xfrm>
+          <a:prstGeom prst="rect">
+            <a:avLst/>
+          </a:prstGeom>
+          <a:noFill/>
+        </p:spPr>
+        <p:txBody>
+          <a:bodyPr wrap="none">
+            <a:spAutoFit/>
+          </a:bodyPr>
+          <a:lstStyle/>
+          <a:p>
+            <a:pPr>
+              <a:defRPr sz="4000" b="1"/>
+            </a:pPr>
             <a:r>
               <a:t>Study Overview</a:t>
             </a:r>
@@ -3175,21 +3205,55 @@
       </p:sp>
       <p:sp>
         <p:nvSpPr>
-          <p:cNvPr id="3" name="Content Placeholder 2"/>
-          <p:cNvSpPr>
-            <a:spLocks noGrp="1"/>
-          </p:cNvSpPr>
-          <p:nvPr>
-            <p:ph idx="1"/>
-          </p:nvPr>
-        </p:nvSpPr>
-        <p:spPr/>
-        <p:txBody>
-          <a:bodyPr/>
-          <a:lstStyle/>
-          <a:p>
-            <a:r>
-              <a:t>This study analyzes the correlation between academic performance in Applied Analytics courses and electronics purchasing behavior at the university bookstore. Data covers 15 matched students from courses 1 and 2.</a:t>
+          <p:cNvPr id="3" name="TextBox 2"/>
+          <p:cNvSpPr txBox="1"/>
+          <p:nvPr/>
+        </p:nvSpPr>
+        <p:spPr>
+          <a:xfrm>
+            <a:off x="457200" y="2377440"/>
+            <a:ext cx="11247120" cy="4114800"/>
+          </a:xfrm>
+          <a:prstGeom prst="rect">
+            <a:avLst/>
+          </a:prstGeom>
+          <a:noFill/>
+        </p:spPr>
+        <p:txBody>
+          <a:bodyPr wrap="square">
+            <a:spAutoFit/>
+          </a:bodyPr>
+          <a:lstStyle/>
+          <a:p>
+            <a:pPr>
+              <a:defRPr sz="1800"/>
+            </a:pPr>
+            <a:r>
+              <a:t>This study analyzes the correlation between academic performance in Applied Analytics courses and electronics purchasing behavior at the university bookstore.</a:t>
+            </a:r>
+          </a:p>
+          <a:p>
+            <a:pPr>
+              <a:defRPr sz="1800"/>
+            </a:pPr>
+            <a:r>
+              <a:t>Data covers 19 matched students from courses 1 and 2.</a:t>
+            </a:r>
+          </a:p>
+          <a:p>
+            <a:pPr>
+              <a:defRPr sz="1800"/>
+            </a:pPr>
+            <a:r>
+              <a:t>Methodology: compute average graded submission scores per student, aggregate Electronics and Cameras category purchases per customer, and cross-reference using the loyalty program registry.</a:t>
+            </a:r>
+          </a:p>
+          <a:p>
+            <a:pPr>
+              <a:defRPr sz="1800"/>
+            </a:pPr>
+            <a:r>
+              <a:t>A Pearson correlation coefficient is computed between average academic score and total electronics spending.</a:t>
             </a:r>
           </a:p>
         </p:txBody>
@@ -3214,19 +3278,29 @@
       <p:grpSpPr/>
       <p:sp>
         <p:nvSpPr>
-          <p:cNvPr id="2" name="Title 1"/>
-          <p:cNvSpPr>
-            <a:spLocks noGrp="1"/>
-          </p:cNvSpPr>
-          <p:nvPr>
-            <p:ph type="title"/>
-          </p:nvPr>
-        </p:nvSpPr>
-        <p:spPr/>
-        <p:txBody>
-          <a:bodyPr/>
-          <a:lstStyle/>
-          <a:p>
+          <p:cNvPr id="2" name="TextBox 1"/>
+          <p:cNvSpPr txBox="1"/>
+          <p:nvPr/>
+        </p:nvSpPr>
+        <p:spPr>
+          <a:xfrm>
+            <a:off x="457200" y="274320"/>
+            <a:ext cx="11247120" cy="1097280"/>
+          </a:xfrm>
+          <a:prstGeom prst="rect">
+            <a:avLst/>
+          </a:prstGeom>
+          <a:noFill/>
+        </p:spPr>
+        <p:txBody>
+          <a:bodyPr wrap="none">
+            <a:spAutoFit/>
+          </a:bodyPr>
+          <a:lstStyle/>
+          <a:p>
+            <a:pPr>
+              <a:defRPr sz="4000" b="1"/>
+            </a:pPr>
             <a:r>
               <a:t>Student Performance Summary</a:t>
             </a:r>
@@ -3235,36 +3309,55 @@
       </p:sp>
       <p:sp>
         <p:nvSpPr>
-          <p:cNvPr id="3" name="Content Placeholder 2"/>
-          <p:cNvSpPr>
-            <a:spLocks noGrp="1"/>
-          </p:cNvSpPr>
-          <p:nvPr>
-            <p:ph idx="1"/>
-          </p:nvPr>
-        </p:nvSpPr>
-        <p:spPr/>
-        <p:txBody>
-          <a:bodyPr/>
-          <a:lstStyle/>
-          <a:p>
-            <a:r>
-              <a:t>Number of matched students: 15</a:t>
-            </a:r>
-          </a:p>
-          <a:p>
-            <a:r>
-              <a:t>Mean academic score: 72.78</a:t>
-            </a:r>
-          </a:p>
-          <a:p>
-            <a:r>
-              <a:t>Score range: 58.4 - 86.88</a:t>
-            </a:r>
-          </a:p>
-          <a:p>
-            <a:r>
-              <a:t>Mean electronics spending: $684.59</a:t>
+          <p:cNvPr id="3" name="TextBox 2"/>
+          <p:cNvSpPr txBox="1"/>
+          <p:nvPr/>
+        </p:nvSpPr>
+        <p:spPr>
+          <a:xfrm>
+            <a:off x="457200" y="2377440"/>
+            <a:ext cx="11247120" cy="4114800"/>
+          </a:xfrm>
+          <a:prstGeom prst="rect">
+            <a:avLst/>
+          </a:prstGeom>
+          <a:noFill/>
+        </p:spPr>
+        <p:txBody>
+          <a:bodyPr wrap="square">
+            <a:spAutoFit/>
+          </a:bodyPr>
+          <a:lstStyle/>
+          <a:p>
+            <a:pPr>
+              <a:defRPr sz="1800"/>
+            </a:pPr>
+            <a:r>
+              <a:t>Number of matched students: 19</a:t>
+            </a:r>
+          </a:p>
+          <a:p>
+            <a:pPr>
+              <a:defRPr sz="1800"/>
+            </a:pPr>
+            <a:r>
+              <a:t>Mean academic score: 72.57</a:t>
+            </a:r>
+          </a:p>
+          <a:p>
+            <a:pPr>
+              <a:defRPr sz="1800"/>
+            </a:pPr>
+            <a:r>
+              <a:t>Mean electronics spending: $552.77</a:t>
+            </a:r>
+          </a:p>
+          <a:p>
+            <a:pPr>
+              <a:defRPr sz="1800"/>
+            </a:pPr>
+            <a:r>
+              <a:t>Each matched student is enrolled in the Applied Analytics courses and has electronics purchase records at the bookstore.</a:t>
             </a:r>
           </a:p>
         </p:txBody>
@@ -3289,19 +3382,29 @@
       <p:grpSpPr/>
       <p:sp>
         <p:nvSpPr>
-          <p:cNvPr id="2" name="Title 1"/>
-          <p:cNvSpPr>
-            <a:spLocks noGrp="1"/>
-          </p:cNvSpPr>
-          <p:nvPr>
-            <p:ph type="title"/>
-          </p:nvPr>
-        </p:nvSpPr>
-        <p:spPr/>
-        <p:txBody>
-          <a:bodyPr/>
-          <a:lstStyle/>
-          <a:p>
+          <p:cNvPr id="2" name="TextBox 1"/>
+          <p:cNvSpPr txBox="1"/>
+          <p:nvPr/>
+        </p:nvSpPr>
+        <p:spPr>
+          <a:xfrm>
+            <a:off x="457200" y="274320"/>
+            <a:ext cx="11247120" cy="1097280"/>
+          </a:xfrm>
+          <a:prstGeom prst="rect">
+            <a:avLst/>
+          </a:prstGeom>
+          <a:noFill/>
+        </p:spPr>
+        <p:txBody>
+          <a:bodyPr wrap="none">
+            <a:spAutoFit/>
+          </a:bodyPr>
+          <a:lstStyle/>
+          <a:p>
+            <a:pPr>
+              <a:defRPr sz="4000" b="1"/>
+            </a:pPr>
             <a:r>
               <a:t>Correlation Findings</a:t>
             </a:r>
@@ -3310,32 +3413,52 @@
       </p:sp>
       <p:sp>
         <p:nvSpPr>
-          <p:cNvPr id="3" name="Content Placeholder 2"/>
-          <p:cNvSpPr>
-            <a:spLocks noGrp="1"/>
-          </p:cNvSpPr>
-          <p:nvPr>
-            <p:ph idx="1"/>
-          </p:nvPr>
-        </p:nvSpPr>
-        <p:spPr/>
-        <p:txBody>
-          <a:bodyPr/>
-          <a:lstStyle/>
-          <a:p>
-            <a:r>
-              <a:t>Pearson Correlation Coefficient: -0.0681</a:t>
-            </a:r>
-          </a:p>
-          <a:p>
-            <a:r>
-              <a:t>P-Value: 0.8093</a:t>
-            </a:r>
-          </a:p>
-          <a:p/>
-          <a:p>
-            <a:r>
-              <a:t>The analysis reveals a negative correlation between academic performance and electronics purchasing behavior.</a:t>
+          <p:cNvPr id="3" name="TextBox 2"/>
+          <p:cNvSpPr txBox="1"/>
+          <p:nvPr/>
+        </p:nvSpPr>
+        <p:spPr>
+          <a:xfrm>
+            <a:off x="457200" y="2377440"/>
+            <a:ext cx="11247120" cy="4114800"/>
+          </a:xfrm>
+          <a:prstGeom prst="rect">
+            <a:avLst/>
+          </a:prstGeom>
+          <a:noFill/>
+        </p:spPr>
+        <p:txBody>
+          <a:bodyPr wrap="square">
+            <a:spAutoFit/>
+          </a:bodyPr>
+          <a:lstStyle/>
+          <a:p>
+            <a:pPr>
+              <a:defRPr sz="1800"/>
+            </a:pPr>
+            <a:r>
+              <a:t>Pearson Correlation Coefficient: -0.0512</a:t>
+            </a:r>
+          </a:p>
+          <a:p>
+            <a:pPr>
+              <a:defRPr sz="1800"/>
+            </a:pPr>
+            <a:r>
+              <a:t>P-Value: 0.835</a:t>
+            </a:r>
+          </a:p>
+          <a:p>
+            <a:pPr>
+              <a:defRPr sz="1800"/>
+            </a:pPr>
+          </a:p>
+          <a:p>
+            <a:pPr>
+              <a:defRPr sz="1800"/>
+            </a:pPr>
+            <a:r>
+              <a:t>The correlation is very close to zero, indicating little to no linear relationship between academic performance and electronics purchasing behavior.</a:t>
             </a:r>
           </a:p>
         </p:txBody>
@@ -3360,19 +3483,29 @@
       <p:grpSpPr/>
       <p:sp>
         <p:nvSpPr>
-          <p:cNvPr id="2" name="Title 1"/>
-          <p:cNvSpPr>
-            <a:spLocks noGrp="1"/>
-          </p:cNvSpPr>
-          <p:nvPr>
-            <p:ph type="title"/>
-          </p:nvPr>
-        </p:nvSpPr>
-        <p:spPr/>
-        <p:txBody>
-          <a:bodyPr/>
-          <a:lstStyle/>
-          <a:p>
+          <p:cNvPr id="2" name="TextBox 1"/>
+          <p:cNvSpPr txBox="1"/>
+          <p:nvPr/>
+        </p:nvSpPr>
+        <p:spPr>
+          <a:xfrm>
+            <a:off x="457200" y="274320"/>
+            <a:ext cx="11247120" cy="1097280"/>
+          </a:xfrm>
+          <a:prstGeom prst="rect">
+            <a:avLst/>
+          </a:prstGeom>
+          <a:noFill/>
+        </p:spPr>
+        <p:txBody>
+          <a:bodyPr wrap="none">
+            <a:spAutoFit/>
+          </a:bodyPr>
+          <a:lstStyle/>
+          <a:p>
+            <a:pPr>
+              <a:defRPr sz="4000" b="1"/>
+            </a:pPr>
             <a:r>
               <a:t>Recommendations</a:t>
             </a:r>
@@ -3381,33 +3514,47 @@
       </p:sp>
       <p:sp>
         <p:nvSpPr>
-          <p:cNvPr id="3" name="Content Placeholder 2"/>
-          <p:cNvSpPr>
-            <a:spLocks noGrp="1"/>
-          </p:cNvSpPr>
-          <p:nvPr>
-            <p:ph idx="1"/>
-          </p:nvPr>
-        </p:nvSpPr>
-        <p:spPr/>
-        <p:txBody>
-          <a:bodyPr/>
-          <a:lstStyle/>
-          <a:p>
+          <p:cNvPr id="3" name="TextBox 2"/>
+          <p:cNvSpPr txBox="1"/>
+          <p:nvPr/>
+        </p:nvSpPr>
+        <p:spPr>
+          <a:xfrm>
+            <a:off x="457200" y="2377440"/>
+            <a:ext cx="11247120" cy="4114800"/>
+          </a:xfrm>
+          <a:prstGeom prst="rect">
+            <a:avLst/>
+          </a:prstGeom>
+          <a:noFill/>
+        </p:spPr>
+        <p:txBody>
+          <a:bodyPr wrap="square">
+            <a:spAutoFit/>
+          </a:bodyPr>
+          <a:lstStyle/>
+          <a:p>
+            <a:pPr>
+              <a:defRPr sz="1800"/>
+            </a:pPr>
             <a:r>
               <a:t>1. Implement student discount program to make electronics more accessible</a:t>
             </a:r>
           </a:p>
-          <a:p/>
-          <a:p>
-            <a:r>
-              <a:t>2. Target marketing toward students with scores above 72.78</a:t>
-            </a:r>
-          </a:p>
-          <a:p/>
-          <a:p>
-            <a:r>
-              <a:t>3. Optimize electronics inventory for 15 student purchasers (avg spend $684.59)</a:t>
+          <a:p>
+            <a:pPr>
+              <a:defRPr sz="1800"/>
+            </a:pPr>
+            <a:r>
+              <a:t>2. Target marketing toward students with scores above 72.57</a:t>
+            </a:r>
+          </a:p>
+          <a:p>
+            <a:pPr>
+              <a:defRPr sz="1800"/>
+            </a:pPr>
+            <a:r>
+              <a:t>3. Optimize electronics inventory for 19 student purchasers (avg spend $552.77)</a:t>
             </a:r>
           </a:p>
         </p:txBody>
